--- a/slides/ch06/v2/ch6-75min-lecture.pptx
+++ b/slides/ch06/v2/ch6-75min-lecture.pptx
@@ -6878,7 +6878,7 @@
                 </a:solidFill>
                 <a:latin typeface="Calibri"/>
               </a:rPr>
-              <a:t>MKTG 4333 / CHAPTER 6</a:t>
+              <a:t>CHAPTER 6</a:t>
             </a:r>
           </a:p>
         </p:txBody>
